--- a/src/keyline/packs/swiss/swiss-neutral-presented.pptx
+++ b/src/keyline/packs/swiss/swiss-neutral-presented.pptx
@@ -211,7 +211,7 @@
           <a:noFill/>
         </p:spPr>
         <p:txBody>
-          <a:bodyPr vert="horz" wrap="square" lIns="0" tIns="0" rIns="0" bIns="0" rtlCol="0" anchor="t">
+          <a:bodyPr vert="horz" wrap="square" lIns="0" tIns="0" rIns="0" bIns="18582" rtlCol="0" anchor="b">
             <a:noAutofit/>
           </a:bodyPr>
           <a:lstStyle>
@@ -710,7 +710,7 @@
           <a:noFill/>
         </p:spPr>
         <p:txBody>
-          <a:bodyPr vert="horz" wrap="square" lIns="0" tIns="0" rIns="0" bIns="0" rtlCol="0" anchor="t">
+          <a:bodyPr vert="horz" wrap="square" lIns="0" tIns="0" rIns="0" bIns="13514" rtlCol="0" anchor="b">
             <a:noAutofit/>
           </a:bodyPr>
           <a:lstStyle>
@@ -891,7 +891,7 @@
           <a:noFill/>
         </p:spPr>
         <p:txBody>
-          <a:bodyPr vert="horz" wrap="square" lIns="0" tIns="0" rIns="0" bIns="0" rtlCol="0" anchor="t">
+          <a:bodyPr vert="horz" wrap="square" lIns="0" tIns="0" rIns="0" bIns="13514" rtlCol="0" anchor="b">
             <a:noAutofit/>
           </a:bodyPr>
           <a:lstStyle>
@@ -1253,7 +1253,7 @@
           <a:noFill/>
         </p:spPr>
         <p:txBody>
-          <a:bodyPr vert="horz" wrap="square" lIns="0" tIns="0" rIns="0" bIns="0" rtlCol="0" anchor="t">
+          <a:bodyPr vert="horz" wrap="square" lIns="0" tIns="0" rIns="0" bIns="18582" rtlCol="0" anchor="b">
             <a:noAutofit/>
           </a:bodyPr>
           <a:lstStyle>

--- a/src/keyline/packs/swiss/swiss-neutral-presented.pptx
+++ b/src/keyline/packs/swiss/swiss-neutral-presented.pptx
@@ -211,7 +211,7 @@
           <a:noFill/>
         </p:spPr>
         <p:txBody>
-          <a:bodyPr vert="horz" wrap="square" lIns="0" tIns="0" rIns="0" bIns="18582" rtlCol="0" anchor="b">
+          <a:bodyPr vert="horz" wrap="square" lIns="0" tIns="0" rIns="0" bIns="41910" rtlCol="0" anchor="b">
             <a:noAutofit/>
           </a:bodyPr>
           <a:lstStyle>
@@ -710,7 +710,7 @@
           <a:noFill/>
         </p:spPr>
         <p:txBody>
-          <a:bodyPr vert="horz" wrap="square" lIns="0" tIns="0" rIns="0" bIns="13514" rtlCol="0" anchor="b">
+          <a:bodyPr vert="horz" wrap="square" lIns="0" tIns="0" rIns="0" bIns="30480" rtlCol="0" anchor="b">
             <a:noAutofit/>
           </a:bodyPr>
           <a:lstStyle>
@@ -891,7 +891,7 @@
           <a:noFill/>
         </p:spPr>
         <p:txBody>
-          <a:bodyPr vert="horz" wrap="square" lIns="0" tIns="0" rIns="0" bIns="13514" rtlCol="0" anchor="b">
+          <a:bodyPr vert="horz" wrap="square" lIns="0" tIns="0" rIns="0" bIns="30480" rtlCol="0" anchor="b">
             <a:noAutofit/>
           </a:bodyPr>
           <a:lstStyle>
@@ -1253,7 +1253,7 @@
           <a:noFill/>
         </p:spPr>
         <p:txBody>
-          <a:bodyPr vert="horz" wrap="square" lIns="0" tIns="0" rIns="0" bIns="18582" rtlCol="0" anchor="b">
+          <a:bodyPr vert="horz" wrap="square" lIns="0" tIns="0" rIns="0" bIns="41910" rtlCol="0" anchor="b">
             <a:noAutofit/>
           </a:bodyPr>
           <a:lstStyle>

--- a/src/keyline/packs/swiss/swiss-neutral-presented.pptx
+++ b/src/keyline/packs/swiss/swiss-neutral-presented.pptx
@@ -23,6 +23,7 @@
           <a:srgbClr val="111111"/>
         </a:solidFill>
         <a:latin typeface="+mn-lt"/>
+        <a:cs typeface="+mn-cs"/>
       </a:defRPr>
     </a:lvl1pPr>
     <a:lvl2pPr marL="0" indent="0" algn="l">
@@ -41,6 +42,7 @@
           <a:srgbClr val="111111"/>
         </a:solidFill>
         <a:latin typeface="+mn-lt"/>
+        <a:cs typeface="+mn-cs"/>
       </a:defRPr>
     </a:lvl2pPr>
     <a:lvl3pPr marL="0" indent="0" algn="l">
@@ -59,6 +61,7 @@
           <a:srgbClr val="111111"/>
         </a:solidFill>
         <a:latin typeface="+mn-lt"/>
+        <a:cs typeface="+mn-cs"/>
       </a:defRPr>
     </a:lvl3pPr>
     <a:lvl4pPr marL="0" indent="0" algn="l">
@@ -77,6 +80,7 @@
           <a:srgbClr val="111111"/>
         </a:solidFill>
         <a:latin typeface="+mn-lt"/>
+        <a:cs typeface="+mn-cs"/>
       </a:defRPr>
     </a:lvl4pPr>
     <a:lvl5pPr marL="0" indent="0" algn="l">
@@ -95,6 +99,7 @@
           <a:srgbClr val="111111"/>
         </a:solidFill>
         <a:latin typeface="+mn-lt"/>
+        <a:cs typeface="+mn-cs"/>
       </a:defRPr>
     </a:lvl5pPr>
     <a:lvl6pPr marL="0" indent="0" algn="l">
@@ -113,6 +118,7 @@
           <a:srgbClr val="111111"/>
         </a:solidFill>
         <a:latin typeface="+mn-lt"/>
+        <a:cs typeface="+mn-cs"/>
       </a:defRPr>
     </a:lvl6pPr>
     <a:lvl7pPr marL="0" indent="0" algn="l">
@@ -131,6 +137,7 @@
           <a:srgbClr val="111111"/>
         </a:solidFill>
         <a:latin typeface="+mn-lt"/>
+        <a:cs typeface="+mn-cs"/>
       </a:defRPr>
     </a:lvl7pPr>
     <a:lvl8pPr marL="0" indent="0" algn="l">
@@ -149,6 +156,7 @@
           <a:srgbClr val="111111"/>
         </a:solidFill>
         <a:latin typeface="+mn-lt"/>
+        <a:cs typeface="+mn-cs"/>
       </a:defRPr>
     </a:lvl8pPr>
     <a:lvl9pPr marL="0" indent="0" algn="l">
@@ -167,6 +175,7 @@
           <a:srgbClr val="111111"/>
         </a:solidFill>
         <a:latin typeface="+mn-lt"/>
+        <a:cs typeface="+mn-cs"/>
       </a:defRPr>
     </a:lvl9pPr>
   </p:defaultTextStyle>
@@ -231,6 +240,7 @@
                   <a:srgbClr val="111111"/>
                 </a:solidFill>
                 <a:latin typeface="+mj-lt"/>
+                <a:cs typeface="+mj-cs"/>
               </a:defRPr>
             </a:lvl1pPr>
           </a:lstStyle>
@@ -283,6 +293,7 @@
                   <a:srgbClr val="111111"/>
                 </a:solidFill>
                 <a:latin typeface="+mn-lt"/>
+                <a:cs typeface="+mn-cs"/>
               </a:defRPr>
             </a:lvl1pPr>
           </a:lstStyle>
@@ -335,6 +346,7 @@
                   <a:srgbClr val="5C5C5A"/>
                 </a:solidFill>
                 <a:latin typeface="+mn-lt"/>
+                <a:cs typeface="+mn-cs"/>
               </a:defRPr>
             </a:lvl1pPr>
           </a:lstStyle>
@@ -420,6 +432,7 @@
                   <a:srgbClr val="F2F2F0"/>
                 </a:solidFill>
                 <a:latin typeface="+mj-lt"/>
+                <a:cs typeface="+mj-cs"/>
               </a:defRPr>
             </a:lvl1pPr>
           </a:lstStyle>
@@ -472,6 +485,7 @@
                   <a:srgbClr val="E8422E"/>
                 </a:solidFill>
                 <a:latin typeface="+mn-lt"/>
+                <a:cs typeface="+mn-cs"/>
               </a:defRPr>
             </a:lvl1pPr>
           </a:lstStyle>
@@ -549,6 +563,7 @@
                   <a:srgbClr val="111111"/>
                 </a:solidFill>
                 <a:latin typeface="+mj-lt"/>
+                <a:cs typeface="+mj-cs"/>
               </a:defRPr>
             </a:lvl1pPr>
           </a:lstStyle>
@@ -601,6 +616,7 @@
                   <a:srgbClr val="111111"/>
                 </a:solidFill>
                 <a:latin typeface="+mn-lt"/>
+                <a:cs typeface="+mn-cs"/>
               </a:defRPr>
             </a:lvl1pPr>
           </a:lstStyle>
@@ -653,6 +669,7 @@
                   <a:srgbClr val="5C5C5A"/>
                 </a:solidFill>
                 <a:latin typeface="+mn-lt"/>
+                <a:cs typeface="+mn-cs"/>
               </a:defRPr>
             </a:lvl1pPr>
           </a:lstStyle>
@@ -730,6 +747,7 @@
                   <a:srgbClr val="111111"/>
                 </a:solidFill>
                 <a:latin typeface="+mj-lt"/>
+                <a:cs typeface="+mj-cs"/>
               </a:defRPr>
             </a:lvl1pPr>
           </a:lstStyle>
@@ -782,6 +800,7 @@
                   <a:srgbClr val="111111"/>
                 </a:solidFill>
                 <a:latin typeface="+mn-lt"/>
+                <a:cs typeface="+mn-cs"/>
               </a:defRPr>
             </a:lvl1pPr>
           </a:lstStyle>
@@ -834,6 +853,7 @@
                   <a:srgbClr val="5C5C5A"/>
                 </a:solidFill>
                 <a:latin typeface="+mn-lt"/>
+                <a:cs typeface="+mn-cs"/>
               </a:defRPr>
             </a:lvl1pPr>
           </a:lstStyle>
@@ -911,6 +931,7 @@
                   <a:srgbClr val="111111"/>
                 </a:solidFill>
                 <a:latin typeface="+mj-lt"/>
+                <a:cs typeface="+mj-cs"/>
               </a:defRPr>
             </a:lvl1pPr>
           </a:lstStyle>
@@ -963,6 +984,7 @@
                   <a:srgbClr val="111111"/>
                 </a:solidFill>
                 <a:latin typeface="+mn-lt"/>
+                <a:cs typeface="+mn-cs"/>
               </a:defRPr>
             </a:lvl1pPr>
           </a:lstStyle>
@@ -1015,6 +1037,7 @@
                   <a:srgbClr val="111111"/>
                 </a:solidFill>
                 <a:latin typeface="+mn-lt"/>
+                <a:cs typeface="+mn-cs"/>
               </a:defRPr>
             </a:lvl1pPr>
           </a:lstStyle>
@@ -1067,6 +1090,7 @@
                   <a:srgbClr val="5C5C5A"/>
                 </a:solidFill>
                 <a:latin typeface="+mn-lt"/>
+                <a:cs typeface="+mn-cs"/>
               </a:defRPr>
             </a:lvl1pPr>
           </a:lstStyle>
@@ -1144,6 +1168,7 @@
                   <a:srgbClr val="111111"/>
                 </a:solidFill>
                 <a:latin typeface="+mj-lt"/>
+                <a:cs typeface="+mj-cs"/>
               </a:defRPr>
             </a:lvl1pPr>
           </a:lstStyle>
@@ -1196,6 +1221,7 @@
                   <a:srgbClr val="5C5C5A"/>
                 </a:solidFill>
                 <a:latin typeface="+mn-lt"/>
+                <a:cs typeface="+mn-cs"/>
               </a:defRPr>
             </a:lvl1pPr>
           </a:lstStyle>
@@ -1273,6 +1299,7 @@
                   <a:srgbClr val="111111"/>
                 </a:solidFill>
                 <a:latin typeface="+mj-lt"/>
+                <a:cs typeface="+mj-cs"/>
               </a:defRPr>
             </a:lvl1pPr>
           </a:lstStyle>
@@ -1325,6 +1352,7 @@
                   <a:srgbClr val="111111"/>
                 </a:solidFill>
                 <a:latin typeface="+mn-lt"/>
+                <a:cs typeface="+mn-cs"/>
               </a:defRPr>
             </a:lvl1pPr>
           </a:lstStyle>
@@ -1377,6 +1405,7 @@
                   <a:srgbClr val="5C5C5A"/>
                 </a:solidFill>
                 <a:latin typeface="+mn-lt"/>
+                <a:cs typeface="+mn-cs"/>
               </a:defRPr>
             </a:lvl1pPr>
           </a:lstStyle>
@@ -1462,6 +1491,7 @@
                   <a:srgbClr val="111111"/>
                 </a:solidFill>
                 <a:latin typeface="+mj-lt"/>
+                <a:cs typeface="+mj-cs"/>
               </a:defRPr>
             </a:lvl1pPr>
           </a:lstStyle>
@@ -1514,6 +1544,7 @@
                   <a:srgbClr val="111111"/>
                 </a:solidFill>
                 <a:latin typeface="+mn-lt"/>
+                <a:cs typeface="+mn-cs"/>
               </a:defRPr>
             </a:lvl1pPr>
           </a:lstStyle>
@@ -1555,6 +1586,7 @@
             <a:srgbClr val="111111"/>
           </a:solidFill>
           <a:latin typeface="+mj-lt"/>
+          <a:cs typeface="+mj-cs"/>
         </a:defRPr>
       </a:lvl1pPr>
       <a:lvl2pPr marL="0" indent="0" algn="l">
@@ -1573,6 +1605,7 @@
             <a:srgbClr val="111111"/>
           </a:solidFill>
           <a:latin typeface="+mj-lt"/>
+          <a:cs typeface="+mj-cs"/>
         </a:defRPr>
       </a:lvl2pPr>
       <a:lvl3pPr marL="0" indent="0" algn="l">
@@ -1591,6 +1624,7 @@
             <a:srgbClr val="111111"/>
           </a:solidFill>
           <a:latin typeface="+mj-lt"/>
+          <a:cs typeface="+mj-cs"/>
         </a:defRPr>
       </a:lvl3pPr>
       <a:lvl4pPr marL="0" indent="0" algn="l">
@@ -1609,6 +1643,7 @@
             <a:srgbClr val="111111"/>
           </a:solidFill>
           <a:latin typeface="+mj-lt"/>
+          <a:cs typeface="+mj-cs"/>
         </a:defRPr>
       </a:lvl4pPr>
       <a:lvl5pPr marL="0" indent="0" algn="l">
@@ -1627,6 +1662,7 @@
             <a:srgbClr val="111111"/>
           </a:solidFill>
           <a:latin typeface="+mj-lt"/>
+          <a:cs typeface="+mj-cs"/>
         </a:defRPr>
       </a:lvl5pPr>
       <a:lvl6pPr marL="0" indent="0" algn="l">
@@ -1645,6 +1681,7 @@
             <a:srgbClr val="111111"/>
           </a:solidFill>
           <a:latin typeface="+mj-lt"/>
+          <a:cs typeface="+mj-cs"/>
         </a:defRPr>
       </a:lvl6pPr>
       <a:lvl7pPr marL="0" indent="0" algn="l">
@@ -1663,6 +1700,7 @@
             <a:srgbClr val="111111"/>
           </a:solidFill>
           <a:latin typeface="+mj-lt"/>
+          <a:cs typeface="+mj-cs"/>
         </a:defRPr>
       </a:lvl7pPr>
       <a:lvl8pPr marL="0" indent="0" algn="l">
@@ -1681,6 +1719,7 @@
             <a:srgbClr val="111111"/>
           </a:solidFill>
           <a:latin typeface="+mj-lt"/>
+          <a:cs typeface="+mj-cs"/>
         </a:defRPr>
       </a:lvl8pPr>
       <a:lvl9pPr marL="0" indent="0" algn="l">
@@ -1699,6 +1738,7 @@
             <a:srgbClr val="111111"/>
           </a:solidFill>
           <a:latin typeface="+mj-lt"/>
+          <a:cs typeface="+mj-cs"/>
         </a:defRPr>
       </a:lvl9pPr>
     </p:titleStyle>
@@ -1719,6 +1759,7 @@
             <a:srgbClr val="111111"/>
           </a:solidFill>
           <a:latin typeface="+mn-lt"/>
+          <a:cs typeface="+mn-cs"/>
         </a:defRPr>
       </a:lvl1pPr>
       <a:lvl2pPr marL="0" indent="0" algn="l">
@@ -1737,6 +1778,7 @@
             <a:srgbClr val="111111"/>
           </a:solidFill>
           <a:latin typeface="+mn-lt"/>
+          <a:cs typeface="+mn-cs"/>
         </a:defRPr>
       </a:lvl2pPr>
       <a:lvl3pPr marL="0" indent="0" algn="l">
@@ -1755,6 +1797,7 @@
             <a:srgbClr val="111111"/>
           </a:solidFill>
           <a:latin typeface="+mn-lt"/>
+          <a:cs typeface="+mn-cs"/>
         </a:defRPr>
       </a:lvl3pPr>
       <a:lvl4pPr marL="0" indent="0" algn="l">
@@ -1773,6 +1816,7 @@
             <a:srgbClr val="111111"/>
           </a:solidFill>
           <a:latin typeface="+mn-lt"/>
+          <a:cs typeface="+mn-cs"/>
         </a:defRPr>
       </a:lvl4pPr>
       <a:lvl5pPr marL="0" indent="0" algn="l">
@@ -1791,6 +1835,7 @@
             <a:srgbClr val="111111"/>
           </a:solidFill>
           <a:latin typeface="+mn-lt"/>
+          <a:cs typeface="+mn-cs"/>
         </a:defRPr>
       </a:lvl5pPr>
       <a:lvl6pPr marL="0" indent="0" algn="l">
@@ -1809,6 +1854,7 @@
             <a:srgbClr val="111111"/>
           </a:solidFill>
           <a:latin typeface="+mn-lt"/>
+          <a:cs typeface="+mn-cs"/>
         </a:defRPr>
       </a:lvl6pPr>
       <a:lvl7pPr marL="0" indent="0" algn="l">
@@ -1827,6 +1873,7 @@
             <a:srgbClr val="111111"/>
           </a:solidFill>
           <a:latin typeface="+mn-lt"/>
+          <a:cs typeface="+mn-cs"/>
         </a:defRPr>
       </a:lvl7pPr>
       <a:lvl8pPr marL="0" indent="0" algn="l">
@@ -1845,6 +1892,7 @@
             <a:srgbClr val="111111"/>
           </a:solidFill>
           <a:latin typeface="+mn-lt"/>
+          <a:cs typeface="+mn-cs"/>
         </a:defRPr>
       </a:lvl8pPr>
       <a:lvl9pPr marL="0" indent="0" algn="l">
@@ -1863,6 +1911,7 @@
             <a:srgbClr val="111111"/>
           </a:solidFill>
           <a:latin typeface="+mn-lt"/>
+          <a:cs typeface="+mn-cs"/>
         </a:defRPr>
       </a:lvl9pPr>
     </p:bodyStyle>
@@ -1883,6 +1932,7 @@
             <a:srgbClr val="111111"/>
           </a:solidFill>
           <a:latin typeface="+mn-lt"/>
+          <a:cs typeface="+mn-cs"/>
         </a:defRPr>
       </a:lvl1pPr>
       <a:lvl2pPr marL="0" indent="0" algn="l">
@@ -1901,6 +1951,7 @@
             <a:srgbClr val="111111"/>
           </a:solidFill>
           <a:latin typeface="+mn-lt"/>
+          <a:cs typeface="+mn-cs"/>
         </a:defRPr>
       </a:lvl2pPr>
       <a:lvl3pPr marL="0" indent="0" algn="l">
@@ -1919,6 +1970,7 @@
             <a:srgbClr val="111111"/>
           </a:solidFill>
           <a:latin typeface="+mn-lt"/>
+          <a:cs typeface="+mn-cs"/>
         </a:defRPr>
       </a:lvl3pPr>
       <a:lvl4pPr marL="0" indent="0" algn="l">
@@ -1937,6 +1989,7 @@
             <a:srgbClr val="111111"/>
           </a:solidFill>
           <a:latin typeface="+mn-lt"/>
+          <a:cs typeface="+mn-cs"/>
         </a:defRPr>
       </a:lvl4pPr>
       <a:lvl5pPr marL="0" indent="0" algn="l">
@@ -1955,6 +2008,7 @@
             <a:srgbClr val="111111"/>
           </a:solidFill>
           <a:latin typeface="+mn-lt"/>
+          <a:cs typeface="+mn-cs"/>
         </a:defRPr>
       </a:lvl5pPr>
       <a:lvl6pPr marL="0" indent="0" algn="l">
@@ -1973,6 +2027,7 @@
             <a:srgbClr val="111111"/>
           </a:solidFill>
           <a:latin typeface="+mn-lt"/>
+          <a:cs typeface="+mn-cs"/>
         </a:defRPr>
       </a:lvl6pPr>
       <a:lvl7pPr marL="0" indent="0" algn="l">
@@ -1991,6 +2046,7 @@
             <a:srgbClr val="111111"/>
           </a:solidFill>
           <a:latin typeface="+mn-lt"/>
+          <a:cs typeface="+mn-cs"/>
         </a:defRPr>
       </a:lvl7pPr>
       <a:lvl8pPr marL="0" indent="0" algn="l">
@@ -2009,6 +2065,7 @@
             <a:srgbClr val="111111"/>
           </a:solidFill>
           <a:latin typeface="+mn-lt"/>
+          <a:cs typeface="+mn-cs"/>
         </a:defRPr>
       </a:lvl8pPr>
       <a:lvl9pPr marL="0" indent="0" algn="l">
@@ -2027,6 +2084,7 @@
             <a:srgbClr val="111111"/>
           </a:solidFill>
           <a:latin typeface="+mn-lt"/>
+          <a:cs typeface="+mn-cs"/>
         </a:defRPr>
       </a:lvl9pPr>
     </p:otherStyle>
@@ -2079,12 +2137,12 @@
       <a:majorFont>
         <a:latin typeface="Arial"/>
         <a:ea typeface=""/>
-        <a:cs typeface=""/>
+        <a:cs typeface="Arial"/>
       </a:majorFont>
       <a:minorFont>
         <a:latin typeface="Arial"/>
         <a:ea typeface=""/>
-        <a:cs typeface=""/>
+        <a:cs typeface="Arial"/>
       </a:minorFont>
     </a:fontScheme>
     <a:fmtScheme name="swiss">
